--- a/doc-mk/ppt/vllm-dp1-dp2-candidate-comparison.pptx
+++ b/doc-mk/ppt/vllm-dp1-dp2-candidate-comparison.pptx
@@ -682,7 +682,7 @@
           <a:p>
             <a:r>
               <a:rPr lang="en-US" dirty="0"/>
-              <a:t>동점이므로 결론은 '조건부 선택'. 판단을 가르는 두 질문: (1) 요청 특성을 얼마나 신뢰할 수 있는가 (2) 배치 재현성이 운영 요구인가 편의인가.</a:t>
+              <a:t>동점이므로 결론은 '조건부 선택'. C2의 이득은 알 수 없는 값 두 가지 — 수명 예측 정확도와 유보량 — 에 걸려 있다.</a:t>
             </a:r>
             <a:endParaRPr lang="en-US" dirty="0"/>
           </a:p>
@@ -3666,7 +3666,7 @@
                 <a:ea typeface="Arial" pitchFamily="34" charset="-122"/>
                 <a:cs typeface="Arial" pitchFamily="34" charset="-120"/>
               </a:rPr>
-              <a:t>신규 tier 추가 시 8개 계약 재정의</a:t>
+              <a:t>(유보) 구분하려면 상위 tier를 유보해야 함</a:t>
             </a:r>
             <a:endParaRPr lang="en-US" sz="1050" dirty="0"/>
           </a:p>
@@ -4363,7 +4363,7 @@
                           <a:ea typeface="Arial" pitchFamily="34" charset="-122"/>
                           <a:cs typeface="Arial" pitchFamily="34" charset="-120"/>
                         </a:rPr>
-                        <a:t>구분 가능 등급 1종 vs 8종. C1은 상위 tier 점유가 도착 순서로 결정됨 (컴포넌트 다이어그램)</a:t>
+                        <a:t>구분 가능 등급 1종 vs 8종. C2의 ★★★는 분류가 맞고 유보량이 적절할 때의 값 — 유보하지 않으면 실측 구분 지표가 2.11로 C1(2.06)과 같아진다</a:t>
                       </a:r>
                       <a:endParaRPr lang="en-US" sz="950" dirty="0">
                         <a:latin typeface="Arial" charset="0"/>
@@ -5509,7 +5509,7 @@
                 <a:ea typeface="Arial" pitchFamily="34" charset="-122"/>
                 <a:cs typeface="Arial" pitchFamily="34" charset="-120"/>
               </a:rPr>
-              <a:t>★★★ 구조적으로 유리 · ★★☆ 가능하나 비용 발생 · ★☆☆ 구조적으로 불리</a:t>
+              <a:t>★★★ 구조적으로 유리 · ★★☆ 가능하나 비용 발생 · ★☆☆ 구조적으로 불리   |   실측값 출처: doc-mk/prototype (테스트 31건)</a:t>
             </a:r>
             <a:endParaRPr lang="en-US" sz="1000" dirty="0"/>
           </a:p>
